--- a/docs/week-3/cen429-week-3-sunum.tr.pptx
+++ b/docs/week-3/cen429-week-3-sunum.tr.pptx
@@ -697,7 +697,7 @@
           <a:lstStyle/>
           <a:p>
             <a:r>
-              <a:t>Sahada kılavuzlarda algoritma envanteri tablosu bulunur. Birkaç yıl önceki envanterlerde SHA-1 ve CBC + ayrı MAC görülür; bugün SHA-256 ve AEAD.</a:t>
+              <a:t>Ünlü "ECB penguen" örneğinin ASCII hâli. Kod incelemesinde 'ecb' geçen her yer bulgudur.</a:t>
             </a:r>
           </a:p>
         </p:txBody>
@@ -767,7 +767,7 @@
           <a:lstStyle/>
           <a:p>
             <a:r>
-              <a:t>Ünlü "ECB penguen" örneğinin ASCII hâli. Kod incelemesinde 'ecb' geçen her yer bulgudur.</a:t>
+              <a:t>200 ms kullanıcıya kabul edilebilir; saldırgana milyar deneme yerine bin deneme demektir. İleri: pepper (gizli, DB'de tutulmaz).</a:t>
             </a:r>
           </a:p>
         </p:txBody>
@@ -837,7 +837,7 @@
           <a:lstStyle/>
           <a:p>
             <a:r>
-              <a:t>200 ms kullanıcıya kabul edilebilir; saldırgana milyar deneme yerine bin deneme demektir. İleri: pepper (gizli, DB'de tutulmaz).</a:t>
+              <a:t>Eleştirel okuma: tasarım dönemindeki gereksinimleri karşıladı; beceri, bugün neyin neden değişmesi gerektiğini gerekçesiyle söylemek.</a:t>
             </a:r>
           </a:p>
         </p:txBody>
@@ -907,7 +907,7 @@
           <a:lstStyle/>
           <a:p>
             <a:r>
-              <a:t>Eleştirel okuma: tasarım dönemindeki gereksinimleri karşıladı; beceri, bugün neyin neden değişmesi gerektiğini gerekçesiyle söylemek.</a:t>
+              <a:t>SSL_set1_host satırını yoruma alıp yeniden derleyin; hangi saldırgan hâlâ yakalanır, hangisi kaçar? Sınıf etkinliği.</a:t>
             </a:r>
           </a:p>
         </p:txBody>
@@ -977,7 +977,7 @@
           <a:lstStyle/>
           <a:p>
             <a:r>
-              <a:t>SSL_set1_host satırını yoruma alıp yeniden derleyin; hangi saldırgan hâlâ yakalanır, hangisi kaçar? Sınıf etkinliği.</a:t>
+              <a:t>Kod incelemesinde catch bloklarını ve "bulunamadı, devam ediliyor" günlüklerini ayrıca arayın.</a:t>
             </a:r>
           </a:p>
         </p:txBody>
@@ -1047,7 +1047,7 @@
           <a:lstStyle/>
           <a:p>
             <a:r>
-              <a:t>Kod incelemesinde catch bloklarını ve "bulunamadı, devam ediliyor" günlüklerini ayrıca arayın.</a:t>
+              <a:t>Sahada aktarım: TLS + açık anahtar sabitleme + sunucu sertifika zinciri denetimi (dış kabuk) ve içinde oturum anahtarlı mesaj şifreleme. Sunucu adresi ve pin değerleri üst uygulamadan parametreyle geliyorsa korunmaları üst uygulamanın sorumluluğu olarak kılavuza yazılır.</a:t>
             </a:r>
           </a:p>
         </p:txBody>
@@ -1117,7 +1117,7 @@
           <a:lstStyle/>
           <a:p>
             <a:r>
-              <a:t>Sahada aktarım: TLS + açık anahtar sabitleme + sunucu sertifika zinciri denetimi (dış kabuk) ve içinde oturum anahtarlı mesaj şifreleme. Sunucu adresi ve pin değerleri üst uygulamadan parametreyle geliyorsa korunmaları üst uygulamanın sorumluluğu olarak kılavuza yazılır.</a:t>
+              <a:t>Değerlendirici ekranlarda, ağ yanıtlarında, günlüklerde, çökme raporlarında, yedeklerde tam kart/kimlik numarası ve parola arar; test ortamında gerçek veri olup olmadığını sorar.</a:t>
             </a:r>
           </a:p>
         </p:txBody>
@@ -1187,7 +1187,7 @@
           <a:lstStyle/>
           <a:p>
             <a:r>
-              <a:t>Değerlendirici ekranlarda, ağ yanıtlarında, günlüklerde, çökme raporlarında, yedeklerde tam kart/kimlik numarası ve parola arar; test ortamında gerçek veri olup olmadığını sorar.</a:t>
+              <a:t>Bugün DES yerine AES tabanlı whitebox ve AEAD tercih edilirdi; matris fikri zamansız. Proje S7'de bu tablo doldurulacak.</a:t>
             </a:r>
           </a:p>
         </p:txBody>
@@ -1257,7 +1257,7 @@
           <a:lstStyle/>
           <a:p>
             <a:r>
-              <a:t>Bugün DES yerine AES tabanlı whitebox ve AEAD tercih edilirdi; matris fikri zamansız. Proje S7'de bu tablo doldurulacak.</a:t>
+              <a:t>Grupları 3-4 kişi yapın. Etkinlik 1 ve 3 tartışma için en verimlisi.</a:t>
             </a:r>
           </a:p>
         </p:txBody>
@@ -1327,7 +1327,7 @@
           <a:lstStyle/>
           <a:p>
             <a:r>
-              <a:t>Grupları 3-4 kişi yapın. Etkinlik 1 ve 3 tartışma için en verimlisi.</a:t>
+              <a:t>önce sordur, sonra cevap slaytını aç</a:t>
             </a:r>
           </a:p>
         </p:txBody>
@@ -1537,76 +1537,6 @@
           <a:lstStyle/>
           <a:p>
             <a:r>
-              <a:t>önce sordur, sonra cevap slaytını aç</a:t>
-            </a:r>
-          </a:p>
-        </p:txBody>
-      </p:sp>
-      <p:sp>
-        <p:nvSpPr>
-          <p:cNvPr id="4" name="Slide Number Placeholder 3"/>
-          <p:cNvSpPr>
-            <a:spLocks noGrp="1"/>
-          </p:cNvSpPr>
-          <p:nvPr>
-            <p:ph type="sldNum" idx="5" sz="quarter"/>
-          </p:nvPr>
-        </p:nvSpPr>
-        <p:spPr/>
-      </p:sp>
-    </p:spTree>
-  </p:cSld>
-  <p:clrMapOvr>
-    <a:masterClrMapping/>
-  </p:clrMapOvr>
-</p:notes>
-</file>
-
-<file path=ppt/notesSlides/notesSlide22.xml><?xml version="1.0" encoding="utf-8"?>
-<p:notes xmlns:a="http://schemas.openxmlformats.org/drawingml/2006/main" xmlns:p="http://schemas.openxmlformats.org/presentationml/2006/main" xmlns:r="http://schemas.openxmlformats.org/officeDocument/2006/relationships">
-  <p:cSld>
-    <p:spTree>
-      <p:nvGrpSpPr>
-        <p:cNvPr id="1" name=""/>
-        <p:cNvGrpSpPr/>
-        <p:nvPr/>
-      </p:nvGrpSpPr>
-      <p:grpSpPr>
-        <a:xfrm>
-          <a:off x="0" y="0"/>
-          <a:ext cx="0" cy="0"/>
-          <a:chOff x="0" y="0"/>
-          <a:chExt cx="0" cy="0"/>
-        </a:xfrm>
-      </p:grpSpPr>
-      <p:sp>
-        <p:nvSpPr>
-          <p:cNvPr id="2" name="Slide Image Placeholder 1"/>
-          <p:cNvSpPr>
-            <a:spLocks noGrp="1"/>
-          </p:cNvSpPr>
-          <p:nvPr>
-            <p:ph type="sldImg" idx="2"/>
-          </p:nvPr>
-        </p:nvSpPr>
-        <p:spPr/>
-      </p:sp>
-      <p:sp>
-        <p:nvSpPr>
-          <p:cNvPr id="3" name="Notes Placeholder 2"/>
-          <p:cNvSpPr>
-            <a:spLocks noGrp="1"/>
-          </p:cNvSpPr>
-          <p:nvPr>
-            <p:ph type="body" idx="3" sz="quarter"/>
-          </p:nvPr>
-        </p:nvSpPr>
-        <p:spPr/>
-        <p:txBody>
-          <a:bodyPr/>
-          <a:lstStyle/>
-          <a:p>
-            <a:r>
               <a:t>Tek bir sırrı üç hâlinde de koruyarak haftayı özetliyoruz.</a:t>
             </a:r>
           </a:p>
@@ -1817,19 +1747,7 @@
           <a:lstStyle/>
           <a:p>
             <a:r>
-              <a:t>Aktarımda</a:t>
-            </a:r>
-          </a:p>
-          <a:p/>
-          <a:p>
-            <a:r>
-              <a:t>Beklemede</a:t>
-            </a:r>
-          </a:p>
-          <a:p/>
-          <a:p>
-            <a:r>
-              <a:t>Kullanımda</a:t>
+              <a:t>RSA ile 1 GB dosya şifrelenmez. Asimetrik yalnız anahtarı taşır. Bu ayrımı netleştirin.</a:t>
             </a:r>
           </a:p>
         </p:txBody>
@@ -1899,7 +1817,7 @@
           <a:lstStyle/>
           <a:p>
             <a:r>
-              <a:t>RSA ile 1 GB dosya şifrelenmez. Asimetrik yalnız anahtarı taşır. Bu ayrımı netleştirin.</a:t>
+              <a:t>AAD'yi vurgulayın: sürüm no, kayıt kimliği gibi bağlanması gereken ama şifrelenmeyecek veriler oraya konur.</a:t>
             </a:r>
           </a:p>
         </p:txBody>
@@ -1969,7 +1887,7 @@
           <a:lstStyle/>
           <a:p>
             <a:r>
-              <a:t>AAD'yi vurgulayın: sürüm no, kayıt kimliği gibi bağlanması gereken ama şifrelenmeyecek veriler oraya konur.</a:t>
+              <a:t>"Değerlendirici bir baytı değiştirip uygulamanın sessizce yanlış veri döndürüp döndürmediğine bakar." Kitap tarif 6.18 → AEAD.</a:t>
             </a:r>
           </a:p>
         </p:txBody>
@@ -2039,7 +1957,7 @@
           <a:lstStyle/>
           <a:p>
             <a:r>
-              <a:t>"Değerlendirici bir baytı değiştirip uygulamanın sessizce yanlış veri döndürüp döndürmediğine bakar." Kitap tarif 6.18 → AEAD.</a:t>
+              <a:t>Şema gereksinimi: rastgele sayı kaynağına yapılan çağrı kancalanamamalı. Sahada ödeme için istemcide rastgele sayı üretilmez; native tarafta yalnız bellek doldurmada kullanılır.</a:t>
             </a:r>
           </a:p>
         </p:txBody>
@@ -2109,7 +2027,7 @@
           <a:lstStyle/>
           <a:p>
             <a:r>
-              <a:t>Şema gereksinimi: rastgele sayı kaynağına yapılan çağrı kancalanamamalı. Sahada ödeme için istemcide rastgele sayı üretilmez; native tarafta yalnız bellek doldurmada kullanılır.</a:t>
+              <a:t>Sahada kılavuzlarda algoritma envanteri tablosu bulunur. Birkaç yıl önceki envanterlerde SHA-1 ve CBC + ayrı MAC görülür; bugün SHA-256 ve AEAD.</a:t>
             </a:r>
           </a:p>
         </p:txBody>
@@ -17385,142 +17303,30 @@
           </a:p>
         </p:txBody>
       </p:sp>
-      <p:sp>
-        <p:nvSpPr>
-          <p:cNvPr id="7" name="TextBox 6"/>
-          <p:cNvSpPr txBox="1"/>
-          <p:nvPr/>
-        </p:nvSpPr>
-        <p:spPr>
-          <a:xfrm>
-            <a:off x="640080" y="1325880"/>
-            <a:ext cx="10911535" cy="307848"/>
-          </a:xfrm>
-          <a:prstGeom prst="rect">
-            <a:avLst/>
-          </a:prstGeom>
-          <a:noFill/>
-        </p:spPr>
-        <p:txBody>
-          <a:bodyPr wrap="square" lIns="45720" rIns="45720">
-            <a:spAutoFit/>
-          </a:bodyPr>
-          <a:lstStyle/>
-          <a:p>
-            <a:pPr algn="l"/>
-            <a:r>
-              <a:rPr sz="1200" b="0">
-                <a:solidFill>
-                  <a:srgbClr val="1F2D3A"/>
-                </a:solidFill>
-              </a:rPr>
-              <a:t>&lt;svg viewBox="0 0 960 300" style="width:97%;height:auto;display:block;margin:2px auto" font-family="sans-serif"&gt;</a:t>
-            </a:r>
-          </a:p>
-        </p:txBody>
-      </p:sp>
-      <p:sp>
-        <p:nvSpPr>
-          <p:cNvPr id="8" name="TextBox 7"/>
-          <p:cNvSpPr txBox="1"/>
-          <p:nvPr/>
-        </p:nvSpPr>
-        <p:spPr>
-          <a:xfrm>
-            <a:off x="640080" y="1743456"/>
-            <a:ext cx="10911535" cy="1100328"/>
-          </a:xfrm>
-          <a:prstGeom prst="rect">
-            <a:avLst/>
-          </a:prstGeom>
-          <a:noFill/>
-        </p:spPr>
-        <p:txBody>
-          <a:bodyPr wrap="square" lIns="45720" rIns="45720">
-            <a:spAutoFit/>
-          </a:bodyPr>
-          <a:lstStyle/>
-          <a:p>
-            <a:pPr algn="l"/>
-            <a:r>
-              <a:rPr sz="1200" b="0">
-                <a:solidFill>
-                  <a:srgbClr val="1F2D3A"/>
-                </a:solidFill>
-              </a:rPr>
-              <a:t>&lt;rect x="20" y="60" width="290" height="180" rx="12" fill="#e8f6f7" stroke="#0a9396" stroke-width="2"/&gt; &lt;text x="165" y="92" text-anchor="middle" font-size="21" fill="#005f66" font-weight="bold"&gt;AKTARIMDA&lt;/text&gt; &lt;text x="165" y="120" text-anchor="middle" font-size="15" fill="#333"&gt;ağ üzerinde giderken&lt;/text&gt; &lt;text x="165" y="152" text-anchor="middle" font-size="15" fill="#c0392b"&gt;tehdit: dinleme / MITM&lt;/text&gt; &lt;text x="165" y="184" text-anchor="middle" font-size="17" fill="#006d77" font-weight="bold"&gt;savunma: TLS 1.3&lt;/text&gt; &lt;text x="165" y="210" text-anchor="middle" font-size="14" fill="#333"&gt;+ pinning · hostname&lt;/text&gt;</a:t>
-            </a:r>
-          </a:p>
-        </p:txBody>
-      </p:sp>
-      <p:sp>
-        <p:nvSpPr>
-          <p:cNvPr id="9" name="TextBox 8"/>
-          <p:cNvSpPr txBox="1"/>
-          <p:nvPr/>
-        </p:nvSpPr>
-        <p:spPr>
-          <a:xfrm>
-            <a:off x="640080" y="2953512"/>
-            <a:ext cx="10911535" cy="1100328"/>
-          </a:xfrm>
-          <a:prstGeom prst="rect">
-            <a:avLst/>
-          </a:prstGeom>
-          <a:noFill/>
-        </p:spPr>
-        <p:txBody>
-          <a:bodyPr wrap="square" lIns="45720" rIns="45720">
-            <a:spAutoFit/>
-          </a:bodyPr>
-          <a:lstStyle/>
-          <a:p>
-            <a:pPr algn="l"/>
-            <a:r>
-              <a:rPr sz="1200" b="0">
-                <a:solidFill>
-                  <a:srgbClr val="1F2D3A"/>
-                </a:solidFill>
-              </a:rPr>
-              <a:t>&lt;rect x="335" y="60" width="290" height="180" rx="12" fill="#eaf4ea" stroke="#2e7d32" stroke-width="2"/&gt; &lt;text x="480" y="92" text-anchor="middle" font-size="21" fill="#1b5e20" font-weight="bold"&gt;BEKLEMEDE&lt;/text&gt; &lt;text x="480" y="120" text-anchor="middle" font-size="15" fill="#333"&gt;diskte / veritabanında&lt;/text&gt; &lt;text x="480" y="152" text-anchor="middle" font-size="15" fill="#c0392b"&gt;tehdit: hırsızlık / kopya&lt;/text&gt; &lt;text x="480" y="184" text-anchor="middle" font-size="17" fill="#2e7d32" font-weight="bold"&gt;savunma: AEAD&lt;/text&gt; &lt;text x="480" y="210" text-anchor="middle" font-size="14" fill="#333"&gt;AES-GCM · KDF · anahtar hiy.&lt;/text&gt;</a:t>
-            </a:r>
-          </a:p>
-        </p:txBody>
-      </p:sp>
-      <p:sp>
-        <p:nvSpPr>
-          <p:cNvPr id="10" name="TextBox 9"/>
-          <p:cNvSpPr txBox="1"/>
-          <p:nvPr/>
-        </p:nvSpPr>
-        <p:spPr>
-          <a:xfrm>
-            <a:off x="640080" y="4163568"/>
-            <a:ext cx="10911535" cy="1298448"/>
-          </a:xfrm>
-          <a:prstGeom prst="rect">
-            <a:avLst/>
-          </a:prstGeom>
-          <a:noFill/>
-        </p:spPr>
-        <p:txBody>
-          <a:bodyPr wrap="square" lIns="45720" rIns="45720">
-            <a:spAutoFit/>
-          </a:bodyPr>
-          <a:lstStyle/>
-          <a:p>
-            <a:pPr algn="l"/>
-            <a:r>
-              <a:rPr sz="1200" b="0">
-                <a:solidFill>
-                  <a:srgbClr val="1F2D3A"/>
-                </a:solidFill>
-              </a:rPr>
-              <a:t>&lt;rect x="650" y="60" width="290" height="180" rx="12" fill="#fdf1e7" stroke="#b5651d" stroke-width="2"/&gt; &lt;text x="795" y="92" text-anchor="middle" font-size="21" fill="#8a4b12" font-weight="bold"&gt;KULLANIMDA&lt;/text&gt; &lt;text x="795" y="120" text-anchor="middle" font-size="15" fill="#333"&gt;RAM'de / işlenirken&lt;/text&gt; &lt;text x="795" y="152" text-anchor="middle" font-size="15" fill="#c0392b"&gt;tehdit: bellek dökümü&lt;/text&gt; &lt;text x="795" y="184" text-anchor="middle" font-size="17" fill="#b5651d" font-weight="bold"&gt;savunma: kısa ömür&lt;/text&gt; &lt;text x="795" y="210" text-anchor="middle" font-size="14" fill="#333"&gt;kullan → hemen sil&lt;/text&gt; &lt;text x="480" y="285" text-anchor="middle" font-size="15" fill="#555"&gt;Bir sır aynı anda üç hâlde de olabilir → her hâlin kendi kabuğu olmalı.&lt;/text&gt; &lt;/svg&gt;</a:t>
-            </a:r>
-          </a:p>
-        </p:txBody>
-      </p:sp>
+      <p:pic>
+        <p:nvPicPr>
+          <p:cNvPr id="7" name="Picture 6" descr="h03-01-verinin-uc-hali.png"/>
+          <p:cNvPicPr>
+            <a:picLocks noChangeAspect="1"/>
+          </p:cNvPicPr>
+          <p:nvPr/>
+        </p:nvPicPr>
+        <p:blipFill>
+          <a:blip r:embed="rId3"/>
+          <a:stretch>
+            <a:fillRect/>
+          </a:stretch>
+        </p:blipFill>
+        <p:spPr>
+          <a:xfrm>
+            <a:off x="1833529" y="1325880"/>
+            <a:ext cx="8524636" cy="3379457"/>
+          </a:xfrm>
+          <a:prstGeom prst="rect">
+            <a:avLst/>
+          </a:prstGeom>
+        </p:spPr>
+      </p:pic>
     </p:spTree>
   </p:cSld>
   <p:clrMapOvr>
